--- a/CalendarioAgo2026/presentaciones/1_IntroduccionAlgoritmosProgramas.pptx
+++ b/CalendarioAgo2026/presentaciones/1_IntroduccionAlgoritmosProgramas.pptx
@@ -145,6 +145,35 @@
 </p:presentation>
 </file>
 
+<file path=ppt/changesInfos/changesInfo1.xml><?xml version="1.0" encoding="utf-8"?>
+<pc:chgInfo xmlns:a="http://schemas.openxmlformats.org/drawingml/2006/main" xmlns:r="http://schemas.openxmlformats.org/officeDocument/2006/relationships" xmlns:ac="http://schemas.microsoft.com/office/drawing/2013/main/command" xmlns:pc="http://schemas.microsoft.com/office/powerpoint/2013/main/command">
+  <pc:docChgLst>
+    <pc:chgData name="Lizethe Pérez Fuertes" userId="4ae9ef87-2a7d-42f8-8dfa-0a501a9e2ff4" providerId="ADAL" clId="{FDDD45CB-1330-4033-A842-3D2746AFF7C7}"/>
+    <pc:docChg chg="custSel modSld">
+      <pc:chgData name="Lizethe Pérez Fuertes" userId="4ae9ef87-2a7d-42f8-8dfa-0a501a9e2ff4" providerId="ADAL" clId="{FDDD45CB-1330-4033-A842-3D2746AFF7C7}" dt="2026-08-07T00:42:23.773" v="19" actId="27636"/>
+      <pc:docMkLst>
+        <pc:docMk/>
+      </pc:docMkLst>
+      <pc:sldChg chg="modSp mod">
+        <pc:chgData name="Lizethe Pérez Fuertes" userId="4ae9ef87-2a7d-42f8-8dfa-0a501a9e2ff4" providerId="ADAL" clId="{FDDD45CB-1330-4033-A842-3D2746AFF7C7}" dt="2026-08-07T00:42:23.773" v="19" actId="27636"/>
+        <pc:sldMkLst>
+          <pc:docMk/>
+          <pc:sldMk cId="2833797989" sldId="316"/>
+        </pc:sldMkLst>
+        <pc:spChg chg="mod">
+          <ac:chgData name="Lizethe Pérez Fuertes" userId="4ae9ef87-2a7d-42f8-8dfa-0a501a9e2ff4" providerId="ADAL" clId="{FDDD45CB-1330-4033-A842-3D2746AFF7C7}" dt="2026-08-07T00:42:23.773" v="19" actId="27636"/>
+          <ac:spMkLst>
+            <pc:docMk/>
+            <pc:sldMk cId="2833797989" sldId="316"/>
+            <ac:spMk id="2" creationId="{00000000-0000-0000-0000-000000000000}"/>
+          </ac:spMkLst>
+        </pc:spChg>
+      </pc:sldChg>
+    </pc:docChg>
+  </pc:docChgLst>
+</pc:chgInfo>
+</file>
+
 <file path=ppt/notesMasters/notesMaster1.xml><?xml version="1.0" encoding="utf-8"?>
 <p:notesMaster xmlns:a="http://schemas.openxmlformats.org/drawingml/2006/main" xmlns:r="http://schemas.openxmlformats.org/officeDocument/2006/relationships" xmlns:p="http://schemas.openxmlformats.org/presentationml/2006/main">
   <p:cSld>
@@ -227,7 +256,7 @@
           <a:p>
             <a:fld id="{2D445F07-8756-451B-A938-0248325FC7BB}" type="datetimeFigureOut">
               <a:rPr lang="es-MX" smtClean="0"/>
-              <a:t>09/08/2022</a:t>
+              <a:t>06/08/2026</a:t>
             </a:fld>
             <a:endParaRPr lang="es-MX" dirty="0"/>
           </a:p>
@@ -1743,7 +1772,7 @@
           <a:p>
             <a:fld id="{5E75A0DC-66C6-4CEC-A5EB-F8C97CEC3796}" type="datetimeFigureOut">
               <a:rPr lang="es-MX" smtClean="0"/>
-              <a:t>09/08/2022</a:t>
+              <a:t>06/08/2026</a:t>
             </a:fld>
             <a:endParaRPr lang="es-MX" dirty="0"/>
           </a:p>
@@ -1913,7 +1942,7 @@
           <a:p>
             <a:fld id="{5E75A0DC-66C6-4CEC-A5EB-F8C97CEC3796}" type="datetimeFigureOut">
               <a:rPr lang="es-MX" smtClean="0"/>
-              <a:t>09/08/2022</a:t>
+              <a:t>06/08/2026</a:t>
             </a:fld>
             <a:endParaRPr lang="es-MX" dirty="0"/>
           </a:p>
@@ -2093,7 +2122,7 @@
           <a:p>
             <a:fld id="{5E75A0DC-66C6-4CEC-A5EB-F8C97CEC3796}" type="datetimeFigureOut">
               <a:rPr lang="es-MX" smtClean="0"/>
-              <a:t>09/08/2022</a:t>
+              <a:t>06/08/2026</a:t>
             </a:fld>
             <a:endParaRPr lang="es-MX" dirty="0"/>
           </a:p>
@@ -2246,7 +2275,7 @@
           <a:p>
             <a:fld id="{1D8BD707-D9CF-40AE-B4C6-C98DA3205C09}" type="datetimeFigureOut">
               <a:rPr lang="en-US" smtClean="0"/>
-              <a:t>8/9/2022</a:t>
+              <a:t>8/6/2026</a:t>
             </a:fld>
             <a:endParaRPr lang="en-US"/>
           </a:p>
@@ -3126,7 +3155,7 @@
           <a:p>
             <a:fld id="{5E75A0DC-66C6-4CEC-A5EB-F8C97CEC3796}" type="datetimeFigureOut">
               <a:rPr lang="es-MX" smtClean="0"/>
-              <a:t>09/08/2022</a:t>
+              <a:t>06/08/2026</a:t>
             </a:fld>
             <a:endParaRPr lang="es-MX" dirty="0"/>
           </a:p>
@@ -3372,7 +3401,7 @@
           <a:p>
             <a:fld id="{5E75A0DC-66C6-4CEC-A5EB-F8C97CEC3796}" type="datetimeFigureOut">
               <a:rPr lang="es-MX" smtClean="0"/>
-              <a:t>09/08/2022</a:t>
+              <a:t>06/08/2026</a:t>
             </a:fld>
             <a:endParaRPr lang="es-MX" dirty="0"/>
           </a:p>
@@ -3660,7 +3689,7 @@
           <a:p>
             <a:fld id="{5E75A0DC-66C6-4CEC-A5EB-F8C97CEC3796}" type="datetimeFigureOut">
               <a:rPr lang="es-MX" smtClean="0"/>
-              <a:t>09/08/2022</a:t>
+              <a:t>06/08/2026</a:t>
             </a:fld>
             <a:endParaRPr lang="es-MX" dirty="0"/>
           </a:p>
@@ -4082,7 +4111,7 @@
           <a:p>
             <a:fld id="{5E75A0DC-66C6-4CEC-A5EB-F8C97CEC3796}" type="datetimeFigureOut">
               <a:rPr lang="es-MX" smtClean="0"/>
-              <a:t>09/08/2022</a:t>
+              <a:t>06/08/2026</a:t>
             </a:fld>
             <a:endParaRPr lang="es-MX" dirty="0"/>
           </a:p>
@@ -4200,7 +4229,7 @@
           <a:p>
             <a:fld id="{5E75A0DC-66C6-4CEC-A5EB-F8C97CEC3796}" type="datetimeFigureOut">
               <a:rPr lang="es-MX" smtClean="0"/>
-              <a:t>09/08/2022</a:t>
+              <a:t>06/08/2026</a:t>
             </a:fld>
             <a:endParaRPr lang="es-MX" dirty="0"/>
           </a:p>
@@ -4295,7 +4324,7 @@
           <a:p>
             <a:fld id="{5E75A0DC-66C6-4CEC-A5EB-F8C97CEC3796}" type="datetimeFigureOut">
               <a:rPr lang="es-MX" smtClean="0"/>
-              <a:t>09/08/2022</a:t>
+              <a:t>06/08/2026</a:t>
             </a:fld>
             <a:endParaRPr lang="es-MX" dirty="0"/>
           </a:p>
@@ -4572,7 +4601,7 @@
           <a:p>
             <a:fld id="{5E75A0DC-66C6-4CEC-A5EB-F8C97CEC3796}" type="datetimeFigureOut">
               <a:rPr lang="es-MX" smtClean="0"/>
-              <a:t>09/08/2022</a:t>
+              <a:t>06/08/2026</a:t>
             </a:fld>
             <a:endParaRPr lang="es-MX" dirty="0"/>
           </a:p>
@@ -4825,7 +4854,7 @@
           <a:p>
             <a:fld id="{5E75A0DC-66C6-4CEC-A5EB-F8C97CEC3796}" type="datetimeFigureOut">
               <a:rPr lang="es-MX" smtClean="0"/>
-              <a:t>09/08/2022</a:t>
+              <a:t>06/08/2026</a:t>
             </a:fld>
             <a:endParaRPr lang="es-MX" dirty="0"/>
           </a:p>
@@ -5038,7 +5067,7 @@
           <a:p>
             <a:fld id="{5E75A0DC-66C6-4CEC-A5EB-F8C97CEC3796}" type="datetimeFigureOut">
               <a:rPr lang="es-MX" smtClean="0"/>
-              <a:t>09/08/2022</a:t>
+              <a:t>06/08/2026</a:t>
             </a:fld>
             <a:endParaRPr lang="es-MX" dirty="0"/>
           </a:p>
@@ -5434,7 +5463,7 @@
         </p:spPr>
         <p:txBody>
           <a:bodyPr rtlCol="0">
-            <a:normAutofit fontScale="90000"/>
+            <a:normAutofit/>
           </a:bodyPr>
           <a:lstStyle/>
           <a:p>
@@ -5452,7 +5481,7 @@
                   </a:schemeClr>
                 </a:solidFill>
               </a:rPr>
-              <a:t>TC1028 </a:t>
+              <a:t>TC 1037 </a:t>
             </a:r>
             <a:br>
               <a:rPr lang="es-MX" sz="3200" dirty="0">
@@ -5471,7 +5500,7 @@
                   </a:schemeClr>
                 </a:solidFill>
               </a:rPr>
-              <a:t>Pensamiento Computacional para Ingeniería</a:t>
+              <a:t>Pensamiento algorítmico</a:t>
             </a:r>
           </a:p>
         </p:txBody>

--- a/CalendarioAgo2026/presentaciones/1_IntroduccionAlgoritmosProgramas.pptx
+++ b/CalendarioAgo2026/presentaciones/1_IntroduccionAlgoritmosProgramas.pptx
@@ -150,24 +150,40 @@
   <pc:docChgLst>
     <pc:chgData name="Lizethe Pérez Fuertes" userId="4ae9ef87-2a7d-42f8-8dfa-0a501a9e2ff4" providerId="ADAL" clId="{FDDD45CB-1330-4033-A842-3D2746AFF7C7}"/>
     <pc:docChg chg="custSel modSld">
-      <pc:chgData name="Lizethe Pérez Fuertes" userId="4ae9ef87-2a7d-42f8-8dfa-0a501a9e2ff4" providerId="ADAL" clId="{FDDD45CB-1330-4033-A842-3D2746AFF7C7}" dt="2026-08-07T00:42:23.773" v="19" actId="27636"/>
+      <pc:chgData name="Lizethe Pérez Fuertes" userId="4ae9ef87-2a7d-42f8-8dfa-0a501a9e2ff4" providerId="ADAL" clId="{FDDD45CB-1330-4033-A842-3D2746AFF7C7}" dt="2026-09-21T20:15:29.997" v="26" actId="166"/>
       <pc:docMkLst>
         <pc:docMk/>
       </pc:docMkLst>
-      <pc:sldChg chg="modSp mod">
-        <pc:chgData name="Lizethe Pérez Fuertes" userId="4ae9ef87-2a7d-42f8-8dfa-0a501a9e2ff4" providerId="ADAL" clId="{FDDD45CB-1330-4033-A842-3D2746AFF7C7}" dt="2026-08-07T00:42:23.773" v="19" actId="27636"/>
+      <pc:sldChg chg="addSp delSp modSp mod">
+        <pc:chgData name="Lizethe Pérez Fuertes" userId="4ae9ef87-2a7d-42f8-8dfa-0a501a9e2ff4" providerId="ADAL" clId="{FDDD45CB-1330-4033-A842-3D2746AFF7C7}" dt="2026-09-21T20:15:29.997" v="26" actId="166"/>
         <pc:sldMkLst>
           <pc:docMk/>
-          <pc:sldMk cId="2833797989" sldId="316"/>
+          <pc:sldMk cId="1824253018" sldId="274"/>
         </pc:sldMkLst>
-        <pc:spChg chg="mod">
-          <ac:chgData name="Lizethe Pérez Fuertes" userId="4ae9ef87-2a7d-42f8-8dfa-0a501a9e2ff4" providerId="ADAL" clId="{FDDD45CB-1330-4033-A842-3D2746AFF7C7}" dt="2026-08-07T00:42:23.773" v="19" actId="27636"/>
-          <ac:spMkLst>
+        <pc:picChg chg="add mod">
+          <ac:chgData name="Lizethe Pérez Fuertes" userId="4ae9ef87-2a7d-42f8-8dfa-0a501a9e2ff4" providerId="ADAL" clId="{FDDD45CB-1330-4033-A842-3D2746AFF7C7}" dt="2026-09-21T20:15:25.162" v="24" actId="14861"/>
+          <ac:picMkLst>
             <pc:docMk/>
-            <pc:sldMk cId="2833797989" sldId="316"/>
-            <ac:spMk id="2" creationId="{00000000-0000-0000-0000-000000000000}"/>
-          </ac:spMkLst>
-        </pc:spChg>
+            <pc:sldMk cId="1824253018" sldId="274"/>
+            <ac:picMk id="3" creationId="{9C72AF72-B4A1-DD10-75F7-0D249D836D20}"/>
+          </ac:picMkLst>
+        </pc:picChg>
+        <pc:picChg chg="del">
+          <ac:chgData name="Lizethe Pérez Fuertes" userId="4ae9ef87-2a7d-42f8-8dfa-0a501a9e2ff4" providerId="ADAL" clId="{FDDD45CB-1330-4033-A842-3D2746AFF7C7}" dt="2026-09-21T20:15:08.599" v="20" actId="478"/>
+          <ac:picMkLst>
+            <pc:docMk/>
+            <pc:sldMk cId="1824253018" sldId="274"/>
+            <ac:picMk id="5" creationId="{BA0A2417-2208-4F11-A655-BE60FAD33D98}"/>
+          </ac:picMkLst>
+        </pc:picChg>
+        <pc:picChg chg="mod ord">
+          <ac:chgData name="Lizethe Pérez Fuertes" userId="4ae9ef87-2a7d-42f8-8dfa-0a501a9e2ff4" providerId="ADAL" clId="{FDDD45CB-1330-4033-A842-3D2746AFF7C7}" dt="2026-09-21T20:15:29.997" v="26" actId="166"/>
+          <ac:picMkLst>
+            <pc:docMk/>
+            <pc:sldMk cId="1824253018" sldId="274"/>
+            <ac:picMk id="9" creationId="{E22303F7-A6D4-4681-A65F-9556A9AE871A}"/>
+          </ac:picMkLst>
+        </pc:picChg>
       </pc:sldChg>
     </pc:docChg>
   </pc:docChgLst>
@@ -256,7 +272,7 @@
           <a:p>
             <a:fld id="{2D445F07-8756-451B-A938-0248325FC7BB}" type="datetimeFigureOut">
               <a:rPr lang="es-MX" smtClean="0"/>
-              <a:t>06/08/2026</a:t>
+              <a:t>21/09/2026</a:t>
             </a:fld>
             <a:endParaRPr lang="es-MX" dirty="0"/>
           </a:p>
@@ -1772,7 +1788,7 @@
           <a:p>
             <a:fld id="{5E75A0DC-66C6-4CEC-A5EB-F8C97CEC3796}" type="datetimeFigureOut">
               <a:rPr lang="es-MX" smtClean="0"/>
-              <a:t>06/08/2026</a:t>
+              <a:t>21/09/2026</a:t>
             </a:fld>
             <a:endParaRPr lang="es-MX" dirty="0"/>
           </a:p>
@@ -1942,7 +1958,7 @@
           <a:p>
             <a:fld id="{5E75A0DC-66C6-4CEC-A5EB-F8C97CEC3796}" type="datetimeFigureOut">
               <a:rPr lang="es-MX" smtClean="0"/>
-              <a:t>06/08/2026</a:t>
+              <a:t>21/09/2026</a:t>
             </a:fld>
             <a:endParaRPr lang="es-MX" dirty="0"/>
           </a:p>
@@ -2122,7 +2138,7 @@
           <a:p>
             <a:fld id="{5E75A0DC-66C6-4CEC-A5EB-F8C97CEC3796}" type="datetimeFigureOut">
               <a:rPr lang="es-MX" smtClean="0"/>
-              <a:t>06/08/2026</a:t>
+              <a:t>21/09/2026</a:t>
             </a:fld>
             <a:endParaRPr lang="es-MX" dirty="0"/>
           </a:p>
@@ -2275,7 +2291,7 @@
           <a:p>
             <a:fld id="{1D8BD707-D9CF-40AE-B4C6-C98DA3205C09}" type="datetimeFigureOut">
               <a:rPr lang="en-US" smtClean="0"/>
-              <a:t>8/6/2026</a:t>
+              <a:t>9/21/2026</a:t>
             </a:fld>
             <a:endParaRPr lang="en-US"/>
           </a:p>
@@ -3155,7 +3171,7 @@
           <a:p>
             <a:fld id="{5E75A0DC-66C6-4CEC-A5EB-F8C97CEC3796}" type="datetimeFigureOut">
               <a:rPr lang="es-MX" smtClean="0"/>
-              <a:t>06/08/2026</a:t>
+              <a:t>21/09/2026</a:t>
             </a:fld>
             <a:endParaRPr lang="es-MX" dirty="0"/>
           </a:p>
@@ -3401,7 +3417,7 @@
           <a:p>
             <a:fld id="{5E75A0DC-66C6-4CEC-A5EB-F8C97CEC3796}" type="datetimeFigureOut">
               <a:rPr lang="es-MX" smtClean="0"/>
-              <a:t>06/08/2026</a:t>
+              <a:t>21/09/2026</a:t>
             </a:fld>
             <a:endParaRPr lang="es-MX" dirty="0"/>
           </a:p>
@@ -3689,7 +3705,7 @@
           <a:p>
             <a:fld id="{5E75A0DC-66C6-4CEC-A5EB-F8C97CEC3796}" type="datetimeFigureOut">
               <a:rPr lang="es-MX" smtClean="0"/>
-              <a:t>06/08/2026</a:t>
+              <a:t>21/09/2026</a:t>
             </a:fld>
             <a:endParaRPr lang="es-MX" dirty="0"/>
           </a:p>
@@ -4111,7 +4127,7 @@
           <a:p>
             <a:fld id="{5E75A0DC-66C6-4CEC-A5EB-F8C97CEC3796}" type="datetimeFigureOut">
               <a:rPr lang="es-MX" smtClean="0"/>
-              <a:t>06/08/2026</a:t>
+              <a:t>21/09/2026</a:t>
             </a:fld>
             <a:endParaRPr lang="es-MX" dirty="0"/>
           </a:p>
@@ -4229,7 +4245,7 @@
           <a:p>
             <a:fld id="{5E75A0DC-66C6-4CEC-A5EB-F8C97CEC3796}" type="datetimeFigureOut">
               <a:rPr lang="es-MX" smtClean="0"/>
-              <a:t>06/08/2026</a:t>
+              <a:t>21/09/2026</a:t>
             </a:fld>
             <a:endParaRPr lang="es-MX" dirty="0"/>
           </a:p>
@@ -4324,7 +4340,7 @@
           <a:p>
             <a:fld id="{5E75A0DC-66C6-4CEC-A5EB-F8C97CEC3796}" type="datetimeFigureOut">
               <a:rPr lang="es-MX" smtClean="0"/>
-              <a:t>06/08/2026</a:t>
+              <a:t>21/09/2026</a:t>
             </a:fld>
             <a:endParaRPr lang="es-MX" dirty="0"/>
           </a:p>
@@ -4601,7 +4617,7 @@
           <a:p>
             <a:fld id="{5E75A0DC-66C6-4CEC-A5EB-F8C97CEC3796}" type="datetimeFigureOut">
               <a:rPr lang="es-MX" smtClean="0"/>
-              <a:t>06/08/2026</a:t>
+              <a:t>21/09/2026</a:t>
             </a:fld>
             <a:endParaRPr lang="es-MX" dirty="0"/>
           </a:p>
@@ -4854,7 +4870,7 @@
           <a:p>
             <a:fld id="{5E75A0DC-66C6-4CEC-A5EB-F8C97CEC3796}" type="datetimeFigureOut">
               <a:rPr lang="es-MX" smtClean="0"/>
-              <a:t>06/08/2026</a:t>
+              <a:t>21/09/2026</a:t>
             </a:fld>
             <a:endParaRPr lang="es-MX" dirty="0"/>
           </a:p>
@@ -5067,7 +5083,7 @@
           <a:p>
             <a:fld id="{5E75A0DC-66C6-4CEC-A5EB-F8C97CEC3796}" type="datetimeFigureOut">
               <a:rPr lang="es-MX" smtClean="0"/>
-              <a:t>06/08/2026</a:t>
+              <a:t>21/09/2026</a:t>
             </a:fld>
             <a:endParaRPr lang="es-MX" dirty="0"/>
           </a:p>
@@ -14985,10 +15001,10 @@
       </p:sp>
       <p:pic>
         <p:nvPicPr>
-          <p:cNvPr id="5" name="Imagen 4">
+          <p:cNvPr id="7" name="1 Imagen">
             <a:extLst>
               <a:ext uri="{FF2B5EF4-FFF2-40B4-BE49-F238E27FC236}">
-                <a16:creationId xmlns:a16="http://schemas.microsoft.com/office/drawing/2014/main" id="{BA0A2417-2208-4F11-A655-BE60FAD33D98}"/>
+                <a16:creationId xmlns:a16="http://schemas.microsoft.com/office/drawing/2014/main" id="{11B4B610-15F4-4D9E-A4D8-69EC6B7080FA}"/>
               </a:ext>
             </a:extLst>
           </p:cNvPr>
@@ -14998,15 +15014,51 @@
           <p:nvPr/>
         </p:nvPicPr>
         <p:blipFill>
-          <a:blip r:embed="rId3"/>
+          <a:blip r:embed="rId3">
+            <a:extLst>
+              <a:ext uri="{28A0092B-C50C-407E-A947-70E740481C1C}">
+                <a14:useLocalDpi xmlns:a14="http://schemas.microsoft.com/office/drawing/2010/main" val="0"/>
+              </a:ext>
+            </a:extLst>
+          </a:blip>
           <a:stretch>
             <a:fillRect/>
           </a:stretch>
         </p:blipFill>
         <p:spPr>
           <a:xfrm>
-            <a:off x="576683" y="1988840"/>
-            <a:ext cx="8158125" cy="3895871"/>
+            <a:off x="7246415" y="77792"/>
+            <a:ext cx="1728192" cy="1603861"/>
+          </a:xfrm>
+          <a:prstGeom prst="rect">
+            <a:avLst/>
+          </a:prstGeom>
+        </p:spPr>
+      </p:pic>
+      <p:pic>
+        <p:nvPicPr>
+          <p:cNvPr id="3" name="Imagen 2">
+            <a:extLst>
+              <a:ext uri="{FF2B5EF4-FFF2-40B4-BE49-F238E27FC236}">
+                <a16:creationId xmlns:a16="http://schemas.microsoft.com/office/drawing/2014/main" id="{9C72AF72-B4A1-DD10-75F7-0D249D836D20}"/>
+              </a:ext>
+            </a:extLst>
+          </p:cNvPr>
+          <p:cNvPicPr>
+            <a:picLocks noChangeAspect="1"/>
+          </p:cNvPicPr>
+          <p:nvPr/>
+        </p:nvPicPr>
+        <p:blipFill>
+          <a:blip r:embed="rId4"/>
+          <a:stretch>
+            <a:fillRect/>
+          </a:stretch>
+        </p:blipFill>
+        <p:spPr>
+          <a:xfrm>
+            <a:off x="1017983" y="1914313"/>
+            <a:ext cx="7108033" cy="3542876"/>
           </a:xfrm>
           <a:prstGeom prst="rect">
             <a:avLst/>
@@ -15035,7 +15087,7 @@
           <p:nvPr/>
         </p:nvPicPr>
         <p:blipFill>
-          <a:blip r:embed="rId4" cstate="print">
+          <a:blip r:embed="rId5" cstate="print">
             <a:extLst>
               <a:ext uri="{28A0092B-C50C-407E-A947-70E740481C1C}">
                 <a14:useLocalDpi xmlns:a14="http://schemas.microsoft.com/office/drawing/2010/main" val="0"/>
@@ -15048,7 +15100,7 @@
         </p:blipFill>
         <p:spPr>
           <a:xfrm>
-            <a:off x="8119563" y="5457189"/>
+            <a:off x="7698494" y="5157192"/>
             <a:ext cx="855044" cy="855044"/>
           </a:xfrm>
           <a:prstGeom prst="rect">
@@ -15062,42 +15114,6 @@
             </a:outerShdw>
             <a:softEdge rad="25400"/>
           </a:effectLst>
-        </p:spPr>
-      </p:pic>
-      <p:pic>
-        <p:nvPicPr>
-          <p:cNvPr id="7" name="1 Imagen">
-            <a:extLst>
-              <a:ext uri="{FF2B5EF4-FFF2-40B4-BE49-F238E27FC236}">
-                <a16:creationId xmlns:a16="http://schemas.microsoft.com/office/drawing/2014/main" id="{11B4B610-15F4-4D9E-A4D8-69EC6B7080FA}"/>
-              </a:ext>
-            </a:extLst>
-          </p:cNvPr>
-          <p:cNvPicPr>
-            <a:picLocks noChangeAspect="1"/>
-          </p:cNvPicPr>
-          <p:nvPr/>
-        </p:nvPicPr>
-        <p:blipFill>
-          <a:blip r:embed="rId5">
-            <a:extLst>
-              <a:ext uri="{28A0092B-C50C-407E-A947-70E740481C1C}">
-                <a14:useLocalDpi xmlns:a14="http://schemas.microsoft.com/office/drawing/2010/main" val="0"/>
-              </a:ext>
-            </a:extLst>
-          </a:blip>
-          <a:stretch>
-            <a:fillRect/>
-          </a:stretch>
-        </p:blipFill>
-        <p:spPr>
-          <a:xfrm>
-            <a:off x="7246415" y="77792"/>
-            <a:ext cx="1728192" cy="1603861"/>
-          </a:xfrm>
-          <a:prstGeom prst="rect">
-            <a:avLst/>
-          </a:prstGeom>
         </p:spPr>
       </p:pic>
     </p:spTree>
